--- a/assets/templates/MS3L_poster_template_gradient.pptx
+++ b/assets/templates/MS3L_poster_template_gradient.pptx
@@ -3199,16 +3199,59 @@
         <p:spPr>
           <a:xfrm>
             <a:off x="1463040" y="566928"/>
-            <a:ext cx="9692640" cy="1674183"/>
+            <a:ext cx="9144000" cy="1579418"/>
           </a:xfrm>
           <a:prstGeom prst="rect">
             <a:avLst/>
           </a:prstGeom>
         </p:spPr>
       </p:pic>
+      <p:sp>
+        <p:nvSpPr>
+          <p:cNvPr id="5" name="Rectangle 4"/>
+          <p:cNvSpPr/>
+          <p:nvPr/>
+        </p:nvSpPr>
+        <p:spPr>
+          <a:xfrm>
+            <a:off x="11109960" y="658368"/>
+            <a:ext cx="45720" cy="1389888"/>
+          </a:xfrm>
+          <a:prstGeom prst="rect">
+            <a:avLst/>
+          </a:prstGeom>
+          <a:solidFill>
+            <a:srgbClr val="BFE9EE"/>
+          </a:solidFill>
+          <a:ln>
+            <a:noFill/>
+          </a:ln>
+        </p:spPr>
+        <p:style>
+          <a:lnRef idx="1">
+            <a:schemeClr val="accent1"/>
+          </a:lnRef>
+          <a:fillRef idx="3">
+            <a:schemeClr val="accent1"/>
+          </a:fillRef>
+          <a:effectRef idx="2">
+            <a:schemeClr val="accent1"/>
+          </a:effectRef>
+          <a:fontRef idx="minor">
+            <a:schemeClr val="lt1"/>
+          </a:fontRef>
+        </p:style>
+        <p:txBody>
+          <a:bodyPr rtlCol="0" anchor="ctr"/>
+          <a:lstStyle/>
+          <a:p>
+            <a:pPr algn="ctr"/>
+          </a:p>
+        </p:txBody>
+      </p:sp>
       <p:pic>
         <p:nvPicPr>
-          <p:cNvPr id="5" name="Picture 4" descr="ms3l-avatar-circle.png"/>
+          <p:cNvPr id="6" name="Picture 5" descr="krict-logo-white.png"/>
           <p:cNvPicPr>
             <a:picLocks noChangeAspect="1"/>
           </p:cNvPicPr>
@@ -3222,8 +3265,8 @@
         </p:blipFill>
         <p:spPr>
           <a:xfrm>
-            <a:off x="29535119" y="566928"/>
-            <a:ext cx="1920240" cy="1920240"/>
+            <a:off x="11658600" y="758952"/>
+            <a:ext cx="3767328" cy="1189848"/>
           </a:xfrm>
           <a:prstGeom prst="rect">
             <a:avLst/>
@@ -3232,7 +3275,7 @@
       </p:pic>
       <p:pic>
         <p:nvPicPr>
-          <p:cNvPr id="6" name="Picture 5" descr="krict-logo-white.png"/>
+          <p:cNvPr id="7" name="Picture 6" descr="ms3l-avatar-circle.png"/>
           <p:cNvPicPr>
             <a:picLocks noChangeAspect="1"/>
           </p:cNvPicPr>
@@ -3246,8 +3289,8 @@
         </p:blipFill>
         <p:spPr>
           <a:xfrm>
-            <a:off x="25237440" y="960120"/>
-            <a:ext cx="3657600" cy="1155192"/>
+            <a:off x="29535119" y="566928"/>
+            <a:ext cx="1920240" cy="1920240"/>
           </a:xfrm>
           <a:prstGeom prst="rect">
             <a:avLst/>
@@ -3256,7 +3299,7 @@
       </p:pic>
       <p:sp>
         <p:nvSpPr>
-          <p:cNvPr id="7" name="TextBox 6"/>
+          <p:cNvPr id="8" name="TextBox 7"/>
           <p:cNvSpPr txBox="1"/>
           <p:nvPr/>
         </p:nvSpPr>
@@ -3295,7 +3338,7 @@
       </p:sp>
       <p:sp>
         <p:nvSpPr>
-          <p:cNvPr id="8" name="TextBox 7"/>
+          <p:cNvPr id="9" name="TextBox 8"/>
           <p:cNvSpPr txBox="1"/>
           <p:nvPr/>
         </p:nvSpPr>
@@ -3334,7 +3377,7 @@
       </p:sp>
       <p:sp>
         <p:nvSpPr>
-          <p:cNvPr id="9" name="TextBox 8"/>
+          <p:cNvPr id="10" name="TextBox 9"/>
           <p:cNvSpPr txBox="1"/>
           <p:nvPr/>
         </p:nvSpPr>
@@ -3374,7 +3417,7 @@
       </p:sp>
       <p:sp>
         <p:nvSpPr>
-          <p:cNvPr id="10" name="Rectangle 9"/>
+          <p:cNvPr id="11" name="Rectangle 10"/>
           <p:cNvSpPr/>
           <p:nvPr/>
         </p:nvSpPr>
@@ -3419,7 +3462,7 @@
       </p:sp>
       <p:sp>
         <p:nvSpPr>
-          <p:cNvPr id="11" name="Rectangle 10"/>
+          <p:cNvPr id="12" name="Rectangle 11"/>
           <p:cNvSpPr/>
           <p:nvPr/>
         </p:nvSpPr>
@@ -3470,7 +3513,7 @@
       </p:sp>
       <p:sp>
         <p:nvSpPr>
-          <p:cNvPr id="12" name="TextBox 11"/>
+          <p:cNvPr id="13" name="TextBox 12"/>
           <p:cNvSpPr txBox="1"/>
           <p:nvPr/>
         </p:nvSpPr>
@@ -3509,7 +3552,7 @@
       </p:sp>
       <p:sp>
         <p:nvSpPr>
-          <p:cNvPr id="13" name="Rectangle 12"/>
+          <p:cNvPr id="14" name="Rectangle 13"/>
           <p:cNvSpPr/>
           <p:nvPr/>
         </p:nvSpPr>
@@ -3560,7 +3603,7 @@
       </p:sp>
       <p:sp>
         <p:nvSpPr>
-          <p:cNvPr id="14" name="TextBox 13"/>
+          <p:cNvPr id="15" name="TextBox 14"/>
           <p:cNvSpPr txBox="1"/>
           <p:nvPr/>
         </p:nvSpPr>
@@ -3600,7 +3643,7 @@
       </p:sp>
       <p:sp>
         <p:nvSpPr>
-          <p:cNvPr id="15" name="Rectangle 14"/>
+          <p:cNvPr id="16" name="Rectangle 15"/>
           <p:cNvSpPr/>
           <p:nvPr/>
         </p:nvSpPr>
@@ -3645,7 +3688,7 @@
       </p:sp>
       <p:sp>
         <p:nvSpPr>
-          <p:cNvPr id="16" name="Rectangle 15"/>
+          <p:cNvPr id="17" name="Rectangle 16"/>
           <p:cNvSpPr/>
           <p:nvPr/>
         </p:nvSpPr>
@@ -3696,7 +3739,7 @@
       </p:sp>
       <p:sp>
         <p:nvSpPr>
-          <p:cNvPr id="17" name="TextBox 16"/>
+          <p:cNvPr id="18" name="TextBox 17"/>
           <p:cNvSpPr txBox="1"/>
           <p:nvPr/>
         </p:nvSpPr>
@@ -3735,7 +3778,7 @@
       </p:sp>
       <p:sp>
         <p:nvSpPr>
-          <p:cNvPr id="18" name="Rectangle 17"/>
+          <p:cNvPr id="19" name="Rectangle 18"/>
           <p:cNvSpPr/>
           <p:nvPr/>
         </p:nvSpPr>
@@ -3786,7 +3829,7 @@
       </p:sp>
       <p:sp>
         <p:nvSpPr>
-          <p:cNvPr id="19" name="TextBox 18"/>
+          <p:cNvPr id="20" name="TextBox 19"/>
           <p:cNvSpPr txBox="1"/>
           <p:nvPr/>
         </p:nvSpPr>
@@ -3826,7 +3869,7 @@
       </p:sp>
       <p:sp>
         <p:nvSpPr>
-          <p:cNvPr id="20" name="Rectangle 19"/>
+          <p:cNvPr id="21" name="Rectangle 20"/>
           <p:cNvSpPr/>
           <p:nvPr/>
         </p:nvSpPr>
@@ -3871,7 +3914,7 @@
       </p:sp>
       <p:sp>
         <p:nvSpPr>
-          <p:cNvPr id="21" name="Rectangle 20"/>
+          <p:cNvPr id="22" name="Rectangle 21"/>
           <p:cNvSpPr/>
           <p:nvPr/>
         </p:nvSpPr>
@@ -3922,7 +3965,7 @@
       </p:sp>
       <p:sp>
         <p:nvSpPr>
-          <p:cNvPr id="22" name="TextBox 21"/>
+          <p:cNvPr id="23" name="TextBox 22"/>
           <p:cNvSpPr txBox="1"/>
           <p:nvPr/>
         </p:nvSpPr>
@@ -3961,7 +4004,7 @@
       </p:sp>
       <p:sp>
         <p:nvSpPr>
-          <p:cNvPr id="23" name="Rectangle 22"/>
+          <p:cNvPr id="24" name="Rectangle 23"/>
           <p:cNvSpPr/>
           <p:nvPr/>
         </p:nvSpPr>
@@ -4012,7 +4055,7 @@
       </p:sp>
       <p:sp>
         <p:nvSpPr>
-          <p:cNvPr id="24" name="TextBox 23"/>
+          <p:cNvPr id="25" name="TextBox 24"/>
           <p:cNvSpPr txBox="1"/>
           <p:nvPr/>
         </p:nvSpPr>
@@ -4052,7 +4095,7 @@
       </p:sp>
       <p:sp>
         <p:nvSpPr>
-          <p:cNvPr id="25" name="Rectangle 24"/>
+          <p:cNvPr id="26" name="Rectangle 25"/>
           <p:cNvSpPr/>
           <p:nvPr/>
         </p:nvSpPr>
@@ -4097,7 +4140,7 @@
       </p:sp>
       <p:sp>
         <p:nvSpPr>
-          <p:cNvPr id="26" name="Rectangle 25"/>
+          <p:cNvPr id="27" name="Rectangle 26"/>
           <p:cNvSpPr/>
           <p:nvPr/>
         </p:nvSpPr>
@@ -4148,7 +4191,7 @@
       </p:sp>
       <p:sp>
         <p:nvSpPr>
-          <p:cNvPr id="27" name="Rectangle 26"/>
+          <p:cNvPr id="28" name="Rectangle 27"/>
           <p:cNvSpPr/>
           <p:nvPr/>
         </p:nvSpPr>
@@ -4193,7 +4236,7 @@
       </p:sp>
       <p:sp>
         <p:nvSpPr>
-          <p:cNvPr id="28" name="TextBox 27"/>
+          <p:cNvPr id="29" name="TextBox 28"/>
           <p:cNvSpPr txBox="1"/>
           <p:nvPr/>
         </p:nvSpPr>
@@ -4232,7 +4275,7 @@
       </p:sp>
       <p:sp>
         <p:nvSpPr>
-          <p:cNvPr id="29" name="TextBox 28"/>
+          <p:cNvPr id="30" name="TextBox 29"/>
           <p:cNvSpPr txBox="1"/>
           <p:nvPr/>
         </p:nvSpPr>
@@ -4271,7 +4314,7 @@
       </p:sp>
       <p:sp>
         <p:nvSpPr>
-          <p:cNvPr id="30" name="Rectangle 29"/>
+          <p:cNvPr id="31" name="Rectangle 30"/>
           <p:cNvSpPr/>
           <p:nvPr/>
         </p:nvSpPr>
@@ -4316,7 +4359,7 @@
       </p:sp>
       <p:sp>
         <p:nvSpPr>
-          <p:cNvPr id="31" name="Rectangle 30"/>
+          <p:cNvPr id="32" name="Rectangle 31"/>
           <p:cNvSpPr/>
           <p:nvPr/>
         </p:nvSpPr>
@@ -4367,7 +4410,7 @@
       </p:sp>
       <p:sp>
         <p:nvSpPr>
-          <p:cNvPr id="32" name="Rectangle 31"/>
+          <p:cNvPr id="33" name="Rectangle 32"/>
           <p:cNvSpPr/>
           <p:nvPr/>
         </p:nvSpPr>
@@ -4412,7 +4455,7 @@
       </p:sp>
       <p:sp>
         <p:nvSpPr>
-          <p:cNvPr id="33" name="TextBox 32"/>
+          <p:cNvPr id="34" name="TextBox 33"/>
           <p:cNvSpPr txBox="1"/>
           <p:nvPr/>
         </p:nvSpPr>
@@ -4451,7 +4494,7 @@
       </p:sp>
       <p:sp>
         <p:nvSpPr>
-          <p:cNvPr id="34" name="TextBox 33"/>
+          <p:cNvPr id="35" name="TextBox 34"/>
           <p:cNvSpPr txBox="1"/>
           <p:nvPr/>
         </p:nvSpPr>
@@ -4490,7 +4533,7 @@
       </p:sp>
       <p:sp>
         <p:nvSpPr>
-          <p:cNvPr id="35" name="Rectangle 34"/>
+          <p:cNvPr id="36" name="Rectangle 35"/>
           <p:cNvSpPr/>
           <p:nvPr/>
         </p:nvSpPr>
@@ -4535,7 +4578,7 @@
       </p:sp>
       <p:sp>
         <p:nvSpPr>
-          <p:cNvPr id="36" name="Rectangle 35"/>
+          <p:cNvPr id="37" name="Rectangle 36"/>
           <p:cNvSpPr/>
           <p:nvPr/>
         </p:nvSpPr>
@@ -4586,7 +4629,7 @@
       </p:sp>
       <p:sp>
         <p:nvSpPr>
-          <p:cNvPr id="37" name="TextBox 36"/>
+          <p:cNvPr id="38" name="TextBox 37"/>
           <p:cNvSpPr txBox="1"/>
           <p:nvPr/>
         </p:nvSpPr>
@@ -4625,7 +4668,7 @@
       </p:sp>
       <p:sp>
         <p:nvSpPr>
-          <p:cNvPr id="38" name="Rectangle 37"/>
+          <p:cNvPr id="39" name="Rectangle 38"/>
           <p:cNvSpPr/>
           <p:nvPr/>
         </p:nvSpPr>
@@ -4676,7 +4719,7 @@
       </p:sp>
       <p:sp>
         <p:nvSpPr>
-          <p:cNvPr id="39" name="TextBox 38"/>
+          <p:cNvPr id="40" name="TextBox 39"/>
           <p:cNvSpPr txBox="1"/>
           <p:nvPr/>
         </p:nvSpPr>
@@ -4716,7 +4759,7 @@
       </p:sp>
       <p:sp>
         <p:nvSpPr>
-          <p:cNvPr id="40" name="Rectangle 39"/>
+          <p:cNvPr id="41" name="Rectangle 40"/>
           <p:cNvSpPr/>
           <p:nvPr/>
         </p:nvSpPr>
@@ -4761,7 +4804,7 @@
       </p:sp>
       <p:sp>
         <p:nvSpPr>
-          <p:cNvPr id="41" name="Rectangle 40"/>
+          <p:cNvPr id="42" name="Rectangle 41"/>
           <p:cNvSpPr/>
           <p:nvPr/>
         </p:nvSpPr>
@@ -4812,7 +4855,7 @@
       </p:sp>
       <p:sp>
         <p:nvSpPr>
-          <p:cNvPr id="42" name="TextBox 41"/>
+          <p:cNvPr id="43" name="TextBox 42"/>
           <p:cNvSpPr txBox="1"/>
           <p:nvPr/>
         </p:nvSpPr>
@@ -4851,7 +4894,7 @@
       </p:sp>
       <p:sp>
         <p:nvSpPr>
-          <p:cNvPr id="43" name="Rectangle 42"/>
+          <p:cNvPr id="44" name="Rectangle 43"/>
           <p:cNvSpPr/>
           <p:nvPr/>
         </p:nvSpPr>
@@ -4902,7 +4945,7 @@
       </p:sp>
       <p:sp>
         <p:nvSpPr>
-          <p:cNvPr id="44" name="Oval 43"/>
+          <p:cNvPr id="45" name="Oval 44"/>
           <p:cNvSpPr/>
           <p:nvPr/>
         </p:nvSpPr>
@@ -4945,7 +4988,7 @@
       </p:sp>
       <p:sp>
         <p:nvSpPr>
-          <p:cNvPr id="45" name="TextBox 44"/>
+          <p:cNvPr id="46" name="TextBox 45"/>
           <p:cNvSpPr txBox="1"/>
           <p:nvPr/>
         </p:nvSpPr>
@@ -4984,7 +5027,7 @@
       </p:sp>
       <p:sp>
         <p:nvSpPr>
-          <p:cNvPr id="46" name="Oval 45"/>
+          <p:cNvPr id="47" name="Oval 46"/>
           <p:cNvSpPr/>
           <p:nvPr/>
         </p:nvSpPr>
@@ -5027,7 +5070,7 @@
       </p:sp>
       <p:sp>
         <p:nvSpPr>
-          <p:cNvPr id="47" name="TextBox 46"/>
+          <p:cNvPr id="48" name="TextBox 47"/>
           <p:cNvSpPr txBox="1"/>
           <p:nvPr/>
         </p:nvSpPr>
@@ -5066,7 +5109,7 @@
       </p:sp>
       <p:sp>
         <p:nvSpPr>
-          <p:cNvPr id="48" name="Oval 47"/>
+          <p:cNvPr id="49" name="Oval 48"/>
           <p:cNvSpPr/>
           <p:nvPr/>
         </p:nvSpPr>
@@ -5109,7 +5152,7 @@
       </p:sp>
       <p:sp>
         <p:nvSpPr>
-          <p:cNvPr id="49" name="TextBox 48"/>
+          <p:cNvPr id="50" name="TextBox 49"/>
           <p:cNvSpPr txBox="1"/>
           <p:nvPr/>
         </p:nvSpPr>
@@ -5148,7 +5191,7 @@
       </p:sp>
       <p:sp>
         <p:nvSpPr>
-          <p:cNvPr id="50" name="TextBox 49"/>
+          <p:cNvPr id="51" name="TextBox 50"/>
           <p:cNvSpPr txBox="1"/>
           <p:nvPr/>
         </p:nvSpPr>
@@ -5187,7 +5230,7 @@
       </p:sp>
       <p:sp>
         <p:nvSpPr>
-          <p:cNvPr id="51" name="Rectangle 50"/>
+          <p:cNvPr id="52" name="Rectangle 51"/>
           <p:cNvSpPr/>
           <p:nvPr/>
         </p:nvSpPr>
@@ -5238,7 +5281,7 @@
       </p:sp>
       <p:sp>
         <p:nvSpPr>
-          <p:cNvPr id="52" name="TextBox 51"/>
+          <p:cNvPr id="53" name="TextBox 52"/>
           <p:cNvSpPr txBox="1"/>
           <p:nvPr/>
         </p:nvSpPr>
@@ -5270,21 +5313,21 @@
                 </a:solidFill>
                 <a:latin typeface="Noto Sans KR"/>
               </a:rPr>
-              <a:t>Membrane-based Sustainable Separation Solutions Laboratory  •  KRICT</a:t>
-            </a:r>
-          </a:p>
-        </p:txBody>
-      </p:sp>
-      <p:sp>
-        <p:nvSpPr>
-          <p:cNvPr id="53" name="TextBox 52"/>
+              <a:t>Membrane-based Sustainable Separation Solutions Laboratory</a:t>
+            </a:r>
+          </a:p>
+        </p:txBody>
+      </p:sp>
+      <p:sp>
+        <p:nvSpPr>
+          <p:cNvPr id="54" name="TextBox 53"/>
           <p:cNvSpPr txBox="1"/>
           <p:nvPr/>
         </p:nvSpPr>
         <p:spPr>
           <a:xfrm>
             <a:off x="1463040" y="42748200"/>
-            <a:ext cx="20116800" cy="822960"/>
+            <a:ext cx="21945600" cy="822960"/>
           </a:xfrm>
           <a:prstGeom prst="rect">
             <a:avLst/>
@@ -5309,14 +5352,14 @@
                 </a:solidFill>
                 <a:latin typeface="Noto Sans KR"/>
               </a:rPr>
-              <a:t>jh.kim@krict.re.kr    •    +82-42-860-7506</a:t>
-            </a:r>
-          </a:p>
-        </p:txBody>
-      </p:sp>
-      <p:sp>
-        <p:nvSpPr>
-          <p:cNvPr id="54" name="TextBox 53"/>
+              <a:t>Chemical Process Technology Division, KRICT    •    jh.kim@krict.re.kr    •    +82-42-860-7506</a:t>
+            </a:r>
+          </a:p>
+        </p:txBody>
+      </p:sp>
+      <p:sp>
+        <p:nvSpPr>
+          <p:cNvPr id="55" name="TextBox 54"/>
           <p:cNvSpPr txBox="1"/>
           <p:nvPr/>
         </p:nvSpPr>
